--- a/Presentation Slides/FIR_Presentation_Group3.pptx
+++ b/Presentation Slides/FIR_Presentation_Group3.pptx
@@ -2999,13 +2999,6 @@
           </a:solidFill>
           <a:ln/>
         </p:spPr>
-        <p:txBody>
-          <a:bodyPr/>
-          <a:lstStyle/>
-          <a:p>
-            <a:endParaRPr lang="en-US"/>
-          </a:p>
-        </p:txBody>
       </p:sp>
       <p:sp>
         <p:nvSpPr>
@@ -3026,13 +3019,6 @@
           </a:solidFill>
           <a:ln/>
         </p:spPr>
-        <p:txBody>
-          <a:bodyPr/>
-          <a:lstStyle/>
-          <a:p>
-            <a:endParaRPr lang="en-US"/>
-          </a:p>
-        </p:txBody>
       </p:sp>
       <p:sp>
         <p:nvSpPr>
@@ -3090,7 +3076,7 @@
                 <a:ea typeface="Cambria" pitchFamily="34" charset="-122"/>
                 <a:cs typeface="Cambria" pitchFamily="34" charset="-120"/>
               </a:rPr>
-              <a:t>73-Tap FIR Filter</a:t>
+              <a:t>73-Tap Symmetric FIR Filter</a:t>
             </a:r>
             <a:endParaRPr lang="en-US" sz="3600" dirty="0"/>
           </a:p>
@@ -3288,13 +3274,6 @@
           </a:solidFill>
           <a:ln/>
         </p:spPr>
-        <p:txBody>
-          <a:bodyPr/>
-          <a:lstStyle/>
-          <a:p>
-            <a:endParaRPr lang="en-US"/>
-          </a:p>
-        </p:txBody>
       </p:sp>
       <p:sp>
         <p:nvSpPr>
@@ -5706,13 +5685,6 @@
           </a:solidFill>
           <a:ln/>
         </p:spPr>
-        <p:txBody>
-          <a:bodyPr/>
-          <a:lstStyle/>
-          <a:p>
-            <a:endParaRPr lang="en-US"/>
-          </a:p>
-        </p:txBody>
       </p:sp>
       <p:sp>
         <p:nvSpPr>
@@ -5818,13 +5790,6 @@
             <a:prstDash val="solid"/>
           </a:ln>
         </p:spPr>
-        <p:txBody>
-          <a:bodyPr/>
-          <a:lstStyle/>
-          <a:p>
-            <a:endParaRPr lang="en-US"/>
-          </a:p>
-        </p:txBody>
       </p:sp>
       <p:sp>
         <p:nvSpPr>
@@ -5888,13 +5853,6 @@
             <a:tailEnd type="triangle"/>
           </a:ln>
         </p:spPr>
-        <p:txBody>
-          <a:bodyPr/>
-          <a:lstStyle/>
-          <a:p>
-            <a:endParaRPr lang="en-US"/>
-          </a:p>
-        </p:txBody>
       </p:sp>
       <p:sp>
         <p:nvSpPr>
@@ -5922,13 +5880,6 @@
             <a:prstDash val="solid"/>
           </a:ln>
         </p:spPr>
-        <p:txBody>
-          <a:bodyPr/>
-          <a:lstStyle/>
-          <a:p>
-            <a:endParaRPr lang="en-US"/>
-          </a:p>
-        </p:txBody>
       </p:sp>
       <p:sp>
         <p:nvSpPr>
@@ -5992,13 +5943,6 @@
             <a:tailEnd type="triangle"/>
           </a:ln>
         </p:spPr>
-        <p:txBody>
-          <a:bodyPr/>
-          <a:lstStyle/>
-          <a:p>
-            <a:endParaRPr lang="en-US"/>
-          </a:p>
-        </p:txBody>
       </p:sp>
       <p:sp>
         <p:nvSpPr>
@@ -6026,13 +5970,6 @@
             <a:prstDash val="solid"/>
           </a:ln>
         </p:spPr>
-        <p:txBody>
-          <a:bodyPr/>
-          <a:lstStyle/>
-          <a:p>
-            <a:endParaRPr lang="en-US"/>
-          </a:p>
-        </p:txBody>
       </p:sp>
       <p:sp>
         <p:nvSpPr>
@@ -6096,13 +6033,6 @@
             <a:tailEnd type="triangle"/>
           </a:ln>
         </p:spPr>
-        <p:txBody>
-          <a:bodyPr/>
-          <a:lstStyle/>
-          <a:p>
-            <a:endParaRPr lang="en-US"/>
-          </a:p>
-        </p:txBody>
       </p:sp>
       <p:sp>
         <p:nvSpPr>
@@ -6130,13 +6060,6 @@
             <a:prstDash val="solid"/>
           </a:ln>
         </p:spPr>
-        <p:txBody>
-          <a:bodyPr/>
-          <a:lstStyle/>
-          <a:p>
-            <a:endParaRPr lang="en-US"/>
-          </a:p>
-        </p:txBody>
       </p:sp>
       <p:sp>
         <p:nvSpPr>
@@ -6200,13 +6123,6 @@
             <a:tailEnd type="triangle"/>
           </a:ln>
         </p:spPr>
-        <p:txBody>
-          <a:bodyPr/>
-          <a:lstStyle/>
-          <a:p>
-            <a:endParaRPr lang="en-US"/>
-          </a:p>
-        </p:txBody>
       </p:sp>
       <p:sp>
         <p:nvSpPr>
@@ -6234,13 +6150,6 @@
             <a:prstDash val="solid"/>
           </a:ln>
         </p:spPr>
-        <p:txBody>
-          <a:bodyPr/>
-          <a:lstStyle/>
-          <a:p>
-            <a:endParaRPr lang="en-US"/>
-          </a:p>
-        </p:txBody>
       </p:sp>
       <p:sp>
         <p:nvSpPr>
@@ -7818,13 +7727,6 @@
             </a:outerShdw>
           </a:effectLst>
         </p:spPr>
-        <p:txBody>
-          <a:bodyPr/>
-          <a:lstStyle/>
-          <a:p>
-            <a:endParaRPr lang="en-US"/>
-          </a:p>
-        </p:txBody>
       </p:sp>
       <p:sp>
         <p:nvSpPr>
@@ -7959,13 +7861,6 @@
           </a:solidFill>
           <a:ln/>
         </p:spPr>
-        <p:txBody>
-          <a:bodyPr/>
-          <a:lstStyle/>
-          <a:p>
-            <a:endParaRPr lang="en-US"/>
-          </a:p>
-        </p:txBody>
       </p:sp>
       <p:sp>
         <p:nvSpPr>
@@ -8073,13 +7968,6 @@
             </a:outerShdw>
           </a:effectLst>
         </p:spPr>
-        <p:txBody>
-          <a:bodyPr/>
-          <a:lstStyle/>
-          <a:p>
-            <a:endParaRPr lang="en-US"/>
-          </a:p>
-        </p:txBody>
       </p:sp>
       <p:sp>
         <p:nvSpPr>
@@ -8438,13 +8326,6 @@
             </a:outerShdw>
           </a:effectLst>
         </p:spPr>
-        <p:txBody>
-          <a:bodyPr/>
-          <a:lstStyle/>
-          <a:p>
-            <a:endParaRPr lang="en-US"/>
-          </a:p>
-        </p:txBody>
       </p:sp>
       <p:sp>
         <p:nvSpPr>
@@ -8555,13 +8436,6 @@
             </a:outerShdw>
           </a:effectLst>
         </p:spPr>
-        <p:txBody>
-          <a:bodyPr/>
-          <a:lstStyle/>
-          <a:p>
-            <a:endParaRPr lang="en-US"/>
-          </a:p>
-        </p:txBody>
       </p:sp>
       <p:sp>
         <p:nvSpPr>
@@ -8696,13 +8570,6 @@
           </a:solidFill>
           <a:ln/>
         </p:spPr>
-        <p:txBody>
-          <a:bodyPr/>
-          <a:lstStyle/>
-          <a:p>
-            <a:endParaRPr lang="en-US"/>
-          </a:p>
-        </p:txBody>
       </p:sp>
       <p:sp>
         <p:nvSpPr>
@@ -8776,7 +8643,7 @@
                 <a:ea typeface="Cambria" pitchFamily="34" charset="-122"/>
                 <a:cs typeface="Cambria" pitchFamily="34" charset="-120"/>
               </a:rPr>
-              <a:t>Code — Symmetric Tap-Pair Mux</a:t>
+              <a:t>Code —  Tap-Pair Mux</a:t>
             </a:r>
             <a:endParaRPr lang="en-US" sz="3000" dirty="0"/>
           </a:p>
@@ -8810,13 +8677,6 @@
             </a:outerShdw>
           </a:effectLst>
         </p:spPr>
-        <p:txBody>
-          <a:bodyPr/>
-          <a:lstStyle/>
-          <a:p>
-            <a:endParaRPr lang="en-US"/>
-          </a:p>
-        </p:txBody>
       </p:sp>
       <p:sp>
         <p:nvSpPr>
@@ -9068,13 +8928,6 @@
             </a:outerShdw>
           </a:effectLst>
         </p:spPr>
-        <p:txBody>
-          <a:bodyPr/>
-          <a:lstStyle/>
-          <a:p>
-            <a:endParaRPr lang="en-US"/>
-          </a:p>
-        </p:txBody>
       </p:sp>
       <p:sp>
         <p:nvSpPr>
@@ -9185,13 +9038,6 @@
             </a:outerShdw>
           </a:effectLst>
         </p:spPr>
-        <p:txBody>
-          <a:bodyPr/>
-          <a:lstStyle/>
-          <a:p>
-            <a:endParaRPr lang="en-US"/>
-          </a:p>
-        </p:txBody>
       </p:sp>
       <p:sp>
         <p:nvSpPr>
@@ -9302,13 +9148,6 @@
             </a:outerShdw>
           </a:effectLst>
         </p:spPr>
-        <p:txBody>
-          <a:bodyPr/>
-          <a:lstStyle/>
-          <a:p>
-            <a:endParaRPr lang="en-US"/>
-          </a:p>
-        </p:txBody>
       </p:sp>
       <p:sp>
         <p:nvSpPr>
@@ -9385,7 +9224,7 @@
                 <a:ea typeface="Calibri" pitchFamily="34" charset="-122"/>
                 <a:cs typeface="Calibri" pitchFamily="34" charset="-120"/>
               </a:rPr>
-              <a:t>Two 73-to-1 muxes ≈ 400 LUT6 + 129 MUXF7 — and they sit on the critical path.</a:t>
+              <a:t>Two 37-to-1 muxes ≈ 400 LUT6 + 129 MUXF7 — and they sit on the critical path.</a:t>
             </a:r>
             <a:endParaRPr lang="en-US" sz="1350" dirty="0"/>
           </a:p>
@@ -9443,13 +9282,6 @@
           </a:solidFill>
           <a:ln/>
         </p:spPr>
-        <p:txBody>
-          <a:bodyPr/>
-          <a:lstStyle/>
-          <a:p>
-            <a:endParaRPr lang="en-US"/>
-          </a:p>
-        </p:txBody>
       </p:sp>
       <p:sp>
         <p:nvSpPr>
@@ -9557,13 +9389,6 @@
             </a:outerShdw>
           </a:effectLst>
         </p:spPr>
-        <p:txBody>
-          <a:bodyPr/>
-          <a:lstStyle/>
-          <a:p>
-            <a:endParaRPr lang="en-US"/>
-          </a:p>
-        </p:txBody>
       </p:sp>
       <p:sp>
         <p:nvSpPr>
@@ -9753,13 +9578,6 @@
             </a:outerShdw>
           </a:effectLst>
         </p:spPr>
-        <p:txBody>
-          <a:bodyPr/>
-          <a:lstStyle/>
-          <a:p>
-            <a:endParaRPr lang="en-US"/>
-          </a:p>
-        </p:txBody>
       </p:sp>
       <p:sp>
         <p:nvSpPr>
@@ -9951,13 +9769,6 @@
             </a:outerShdw>
           </a:effectLst>
         </p:spPr>
-        <p:txBody>
-          <a:bodyPr/>
-          <a:lstStyle/>
-          <a:p>
-            <a:endParaRPr lang="en-US"/>
-          </a:p>
-        </p:txBody>
       </p:sp>
       <p:sp>
         <p:nvSpPr>
@@ -10134,13 +9945,6 @@
           </a:solidFill>
           <a:ln/>
         </p:spPr>
-        <p:txBody>
-          <a:bodyPr/>
-          <a:lstStyle/>
-          <a:p>
-            <a:endParaRPr lang="en-US"/>
-          </a:p>
-        </p:txBody>
       </p:sp>
       <p:sp>
         <p:nvSpPr>
@@ -10248,13 +10052,6 @@
             </a:outerShdw>
           </a:effectLst>
         </p:spPr>
-        <p:txBody>
-          <a:bodyPr/>
-          <a:lstStyle/>
-          <a:p>
-            <a:endParaRPr lang="en-US"/>
-          </a:p>
-        </p:txBody>
       </p:sp>
       <p:sp>
         <p:nvSpPr>
@@ -10564,13 +10361,6 @@
             </a:outerShdw>
           </a:effectLst>
         </p:spPr>
-        <p:txBody>
-          <a:bodyPr/>
-          <a:lstStyle/>
-          <a:p>
-            <a:endParaRPr lang="en-US"/>
-          </a:p>
-        </p:txBody>
       </p:sp>
       <p:sp>
         <p:nvSpPr>
@@ -10681,13 +10471,6 @@
             </a:outerShdw>
           </a:effectLst>
         </p:spPr>
-        <p:txBody>
-          <a:bodyPr/>
-          <a:lstStyle/>
-          <a:p>
-            <a:endParaRPr lang="en-US"/>
-          </a:p>
-        </p:txBody>
       </p:sp>
       <p:sp>
         <p:nvSpPr>
@@ -10861,13 +10644,6 @@
           </a:solidFill>
           <a:ln/>
         </p:spPr>
-        <p:txBody>
-          <a:bodyPr/>
-          <a:lstStyle/>
-          <a:p>
-            <a:endParaRPr lang="en-US"/>
-          </a:p>
-        </p:txBody>
       </p:sp>
       <p:sp>
         <p:nvSpPr>
@@ -10966,13 +10742,6 @@
           </a:solidFill>
           <a:ln/>
         </p:spPr>
-        <p:txBody>
-          <a:bodyPr/>
-          <a:lstStyle/>
-          <a:p>
-            <a:endParaRPr lang="en-US"/>
-          </a:p>
-        </p:txBody>
       </p:sp>
       <p:sp>
         <p:nvSpPr>
@@ -11110,13 +10879,6 @@
           </a:solidFill>
           <a:ln/>
         </p:spPr>
-        <p:txBody>
-          <a:bodyPr/>
-          <a:lstStyle/>
-          <a:p>
-            <a:endParaRPr lang="en-US"/>
-          </a:p>
-        </p:txBody>
       </p:sp>
       <p:sp>
         <p:nvSpPr>
@@ -11254,13 +11016,6 @@
           </a:solidFill>
           <a:ln/>
         </p:spPr>
-        <p:txBody>
-          <a:bodyPr/>
-          <a:lstStyle/>
-          <a:p>
-            <a:endParaRPr lang="en-US"/>
-          </a:p>
-        </p:txBody>
       </p:sp>
       <p:sp>
         <p:nvSpPr>
@@ -11398,13 +11153,6 @@
           </a:solidFill>
           <a:ln/>
         </p:spPr>
-        <p:txBody>
-          <a:bodyPr/>
-          <a:lstStyle/>
-          <a:p>
-            <a:endParaRPr lang="en-US"/>
-          </a:p>
-        </p:txBody>
       </p:sp>
       <p:sp>
         <p:nvSpPr>
@@ -11542,13 +11290,6 @@
           </a:solidFill>
           <a:ln/>
         </p:spPr>
-        <p:txBody>
-          <a:bodyPr/>
-          <a:lstStyle/>
-          <a:p>
-            <a:endParaRPr lang="en-US"/>
-          </a:p>
-        </p:txBody>
       </p:sp>
       <p:sp>
         <p:nvSpPr>
@@ -11695,13 +11436,6 @@
             </a:outerShdw>
           </a:effectLst>
         </p:spPr>
-        <p:txBody>
-          <a:bodyPr/>
-          <a:lstStyle/>
-          <a:p>
-            <a:endParaRPr lang="en-US"/>
-          </a:p>
-        </p:txBody>
       </p:sp>
       <p:sp>
         <p:nvSpPr>
@@ -11832,13 +11566,6 @@
             </a:outerShdw>
           </a:effectLst>
         </p:spPr>
-        <p:txBody>
-          <a:bodyPr/>
-          <a:lstStyle/>
-          <a:p>
-            <a:endParaRPr lang="en-US"/>
-          </a:p>
-        </p:txBody>
       </p:sp>
       <p:sp>
         <p:nvSpPr>
@@ -12009,13 +11736,6 @@
           </a:solidFill>
           <a:ln/>
         </p:spPr>
-        <p:txBody>
-          <a:bodyPr/>
-          <a:lstStyle/>
-          <a:p>
-            <a:endParaRPr lang="en-US"/>
-          </a:p>
-        </p:txBody>
       </p:sp>
       <p:sp>
         <p:nvSpPr>
@@ -12210,13 +11930,6 @@
           </a:solidFill>
           <a:ln/>
         </p:spPr>
-        <p:txBody>
-          <a:bodyPr/>
-          <a:lstStyle/>
-          <a:p>
-            <a:endParaRPr lang="en-US"/>
-          </a:p>
-        </p:txBody>
       </p:sp>
       <p:sp>
         <p:nvSpPr>
@@ -13473,13 +13186,6 @@
             </a:outerShdw>
           </a:effectLst>
         </p:spPr>
-        <p:txBody>
-          <a:bodyPr/>
-          <a:lstStyle/>
-          <a:p>
-            <a:endParaRPr lang="en-US"/>
-          </a:p>
-        </p:txBody>
       </p:sp>
       <p:sp>
         <p:nvSpPr>
@@ -13611,13 +13317,6 @@
           </a:solidFill>
           <a:ln/>
         </p:spPr>
-        <p:txBody>
-          <a:bodyPr/>
-          <a:lstStyle/>
-          <a:p>
-            <a:endParaRPr lang="en-US"/>
-          </a:p>
-        </p:txBody>
       </p:sp>
       <p:sp>
         <p:nvSpPr>
@@ -15019,13 +14718,6 @@
             </a:outerShdw>
           </a:effectLst>
         </p:spPr>
-        <p:txBody>
-          <a:bodyPr/>
-          <a:lstStyle/>
-          <a:p>
-            <a:endParaRPr lang="en-US"/>
-          </a:p>
-        </p:txBody>
       </p:sp>
       <p:sp>
         <p:nvSpPr>
@@ -15136,13 +14828,6 @@
             </a:outerShdw>
           </a:effectLst>
         </p:spPr>
-        <p:txBody>
-          <a:bodyPr/>
-          <a:lstStyle/>
-          <a:p>
-            <a:endParaRPr lang="en-US"/>
-          </a:p>
-        </p:txBody>
       </p:sp>
       <p:sp>
         <p:nvSpPr>
@@ -15253,13 +14938,6 @@
             </a:outerShdw>
           </a:effectLst>
         </p:spPr>
-        <p:txBody>
-          <a:bodyPr/>
-          <a:lstStyle/>
-          <a:p>
-            <a:endParaRPr lang="en-US"/>
-          </a:p>
-        </p:txBody>
       </p:sp>
       <p:sp>
         <p:nvSpPr>
@@ -15433,13 +15111,6 @@
           </a:solidFill>
           <a:ln/>
         </p:spPr>
-        <p:txBody>
-          <a:bodyPr/>
-          <a:lstStyle/>
-          <a:p>
-            <a:endParaRPr lang="en-US"/>
-          </a:p>
-        </p:txBody>
       </p:sp>
       <p:sp>
         <p:nvSpPr>
@@ -15538,13 +15209,6 @@
           </a:solidFill>
           <a:ln/>
         </p:spPr>
-        <p:txBody>
-          <a:bodyPr/>
-          <a:lstStyle/>
-          <a:p>
-            <a:endParaRPr lang="en-US"/>
-          </a:p>
-        </p:txBody>
       </p:sp>
       <p:sp>
         <p:nvSpPr>
@@ -15643,13 +15307,6 @@
           </a:solidFill>
           <a:ln/>
         </p:spPr>
-        <p:txBody>
-          <a:bodyPr/>
-          <a:lstStyle/>
-          <a:p>
-            <a:endParaRPr lang="en-US"/>
-          </a:p>
-        </p:txBody>
       </p:sp>
       <p:sp>
         <p:nvSpPr>
@@ -15748,13 +15405,6 @@
           </a:solidFill>
           <a:ln/>
         </p:spPr>
-        <p:txBody>
-          <a:bodyPr/>
-          <a:lstStyle/>
-          <a:p>
-            <a:endParaRPr lang="en-US"/>
-          </a:p>
-        </p:txBody>
       </p:sp>
       <p:sp>
         <p:nvSpPr>
@@ -15853,13 +15503,6 @@
           </a:solidFill>
           <a:ln/>
         </p:spPr>
-        <p:txBody>
-          <a:bodyPr/>
-          <a:lstStyle/>
-          <a:p>
-            <a:endParaRPr lang="en-US"/>
-          </a:p>
-        </p:txBody>
       </p:sp>
       <p:sp>
         <p:nvSpPr>
@@ -15958,13 +15601,6 @@
           </a:solidFill>
           <a:ln/>
         </p:spPr>
-        <p:txBody>
-          <a:bodyPr/>
-          <a:lstStyle/>
-          <a:p>
-            <a:endParaRPr lang="en-US"/>
-          </a:p>
-        </p:txBody>
       </p:sp>
       <p:sp>
         <p:nvSpPr>
@@ -16063,13 +15699,6 @@
           </a:solidFill>
           <a:ln/>
         </p:spPr>
-        <p:txBody>
-          <a:bodyPr/>
-          <a:lstStyle/>
-          <a:p>
-            <a:endParaRPr lang="en-US"/>
-          </a:p>
-        </p:txBody>
       </p:sp>
       <p:sp>
         <p:nvSpPr>
@@ -16168,13 +15797,6 @@
           </a:solidFill>
           <a:ln/>
         </p:spPr>
-        <p:txBody>
-          <a:bodyPr/>
-          <a:lstStyle/>
-          <a:p>
-            <a:endParaRPr lang="en-US"/>
-          </a:p>
-        </p:txBody>
       </p:sp>
       <p:sp>
         <p:nvSpPr>
@@ -16273,13 +15895,6 @@
           </a:solidFill>
           <a:ln/>
         </p:spPr>
-        <p:txBody>
-          <a:bodyPr/>
-          <a:lstStyle/>
-          <a:p>
-            <a:endParaRPr lang="en-US"/>
-          </a:p>
-        </p:txBody>
       </p:sp>
       <p:sp>
         <p:nvSpPr>
@@ -16378,13 +15993,6 @@
           </a:solidFill>
           <a:ln/>
         </p:spPr>
-        <p:txBody>
-          <a:bodyPr/>
-          <a:lstStyle/>
-          <a:p>
-            <a:endParaRPr lang="en-US"/>
-          </a:p>
-        </p:txBody>
       </p:sp>
       <p:sp>
         <p:nvSpPr>
@@ -16483,13 +16091,6 @@
           </a:solidFill>
           <a:ln/>
         </p:spPr>
-        <p:txBody>
-          <a:bodyPr/>
-          <a:lstStyle/>
-          <a:p>
-            <a:endParaRPr lang="en-US"/>
-          </a:p>
-        </p:txBody>
       </p:sp>
       <p:sp>
         <p:nvSpPr>
@@ -16588,13 +16189,6 @@
           </a:solidFill>
           <a:ln/>
         </p:spPr>
-        <p:txBody>
-          <a:bodyPr/>
-          <a:lstStyle/>
-          <a:p>
-            <a:endParaRPr lang="en-US"/>
-          </a:p>
-        </p:txBody>
       </p:sp>
       <p:sp>
         <p:nvSpPr>
@@ -16693,13 +16287,6 @@
           </a:solidFill>
           <a:ln/>
         </p:spPr>
-        <p:txBody>
-          <a:bodyPr/>
-          <a:lstStyle/>
-          <a:p>
-            <a:endParaRPr lang="en-US"/>
-          </a:p>
-        </p:txBody>
       </p:sp>
       <p:sp>
         <p:nvSpPr>
@@ -16798,13 +16385,6 @@
           </a:solidFill>
           <a:ln/>
         </p:spPr>
-        <p:txBody>
-          <a:bodyPr/>
-          <a:lstStyle/>
-          <a:p>
-            <a:endParaRPr lang="en-US"/>
-          </a:p>
-        </p:txBody>
       </p:sp>
       <p:sp>
         <p:nvSpPr>
@@ -16936,13 +16516,6 @@
           </a:solidFill>
           <a:ln/>
         </p:spPr>
-        <p:txBody>
-          <a:bodyPr/>
-          <a:lstStyle/>
-          <a:p>
-            <a:endParaRPr lang="en-US"/>
-          </a:p>
-        </p:txBody>
       </p:sp>
       <p:sp>
         <p:nvSpPr>
@@ -17050,13 +16623,6 @@
             </a:outerShdw>
           </a:effectLst>
         </p:spPr>
-        <p:txBody>
-          <a:bodyPr/>
-          <a:lstStyle/>
-          <a:p>
-            <a:endParaRPr lang="en-US"/>
-          </a:p>
-        </p:txBody>
       </p:sp>
       <p:sp>
         <p:nvSpPr>
@@ -17164,13 +16730,6 @@
             </a:outerShdw>
           </a:effectLst>
         </p:spPr>
-        <p:txBody>
-          <a:bodyPr/>
-          <a:lstStyle/>
-          <a:p>
-            <a:endParaRPr lang="en-US"/>
-          </a:p>
-        </p:txBody>
       </p:sp>
       <p:sp>
         <p:nvSpPr>
@@ -17278,13 +16837,6 @@
             </a:outerShdw>
           </a:effectLst>
         </p:spPr>
-        <p:txBody>
-          <a:bodyPr/>
-          <a:lstStyle/>
-          <a:p>
-            <a:endParaRPr lang="en-US"/>
-          </a:p>
-        </p:txBody>
       </p:sp>
       <p:sp>
         <p:nvSpPr>
@@ -17392,13 +16944,6 @@
             </a:outerShdw>
           </a:effectLst>
         </p:spPr>
-        <p:txBody>
-          <a:bodyPr/>
-          <a:lstStyle/>
-          <a:p>
-            <a:endParaRPr lang="en-US"/>
-          </a:p>
-        </p:txBody>
       </p:sp>
       <p:sp>
         <p:nvSpPr>
@@ -18787,13 +18332,6 @@
             </a:outerShdw>
           </a:effectLst>
         </p:spPr>
-        <p:txBody>
-          <a:bodyPr/>
-          <a:lstStyle/>
-          <a:p>
-            <a:endParaRPr lang="en-US"/>
-          </a:p>
-        </p:txBody>
       </p:sp>
       <p:sp>
         <p:nvSpPr>
@@ -18904,13 +18442,6 @@
             </a:outerShdw>
           </a:effectLst>
         </p:spPr>
-        <p:txBody>
-          <a:bodyPr/>
-          <a:lstStyle/>
-          <a:p>
-            <a:endParaRPr lang="en-US"/>
-          </a:p>
-        </p:txBody>
       </p:sp>
       <p:sp>
         <p:nvSpPr>
@@ -19042,13 +18573,6 @@
           </a:solidFill>
           <a:ln/>
         </p:spPr>
-        <p:txBody>
-          <a:bodyPr/>
-          <a:lstStyle/>
-          <a:p>
-            <a:endParaRPr lang="en-US"/>
-          </a:p>
-        </p:txBody>
       </p:sp>
       <p:sp>
         <p:nvSpPr>
@@ -19193,13 +18717,6 @@
             <a:prstDash val="solid"/>
           </a:ln>
         </p:spPr>
-        <p:txBody>
-          <a:bodyPr/>
-          <a:lstStyle/>
-          <a:p>
-            <a:endParaRPr lang="en-US"/>
-          </a:p>
-        </p:txBody>
       </p:sp>
       <p:sp>
         <p:nvSpPr>
@@ -19302,13 +18819,6 @@
             <a:tailEnd type="triangle"/>
           </a:ln>
         </p:spPr>
-        <p:txBody>
-          <a:bodyPr/>
-          <a:lstStyle/>
-          <a:p>
-            <a:endParaRPr lang="en-US"/>
-          </a:p>
-        </p:txBody>
       </p:sp>
       <p:sp>
         <p:nvSpPr>
@@ -19336,13 +18846,6 @@
             <a:prstDash val="solid"/>
           </a:ln>
         </p:spPr>
-        <p:txBody>
-          <a:bodyPr/>
-          <a:lstStyle/>
-          <a:p>
-            <a:endParaRPr lang="en-US"/>
-          </a:p>
-        </p:txBody>
       </p:sp>
       <p:sp>
         <p:nvSpPr>
@@ -19445,13 +18948,6 @@
             <a:tailEnd type="triangle"/>
           </a:ln>
         </p:spPr>
-        <p:txBody>
-          <a:bodyPr/>
-          <a:lstStyle/>
-          <a:p>
-            <a:endParaRPr lang="en-US"/>
-          </a:p>
-        </p:txBody>
       </p:sp>
       <p:sp>
         <p:nvSpPr>
@@ -19479,13 +18975,6 @@
             <a:prstDash val="solid"/>
           </a:ln>
         </p:spPr>
-        <p:txBody>
-          <a:bodyPr/>
-          <a:lstStyle/>
-          <a:p>
-            <a:endParaRPr lang="en-US"/>
-          </a:p>
-        </p:txBody>
       </p:sp>
       <p:sp>
         <p:nvSpPr>
@@ -19588,13 +19077,6 @@
             <a:tailEnd type="triangle"/>
           </a:ln>
         </p:spPr>
-        <p:txBody>
-          <a:bodyPr/>
-          <a:lstStyle/>
-          <a:p>
-            <a:endParaRPr lang="en-US"/>
-          </a:p>
-        </p:txBody>
       </p:sp>
       <p:sp>
         <p:nvSpPr>
@@ -19622,13 +19104,6 @@
             <a:prstDash val="solid"/>
           </a:ln>
         </p:spPr>
-        <p:txBody>
-          <a:bodyPr/>
-          <a:lstStyle/>
-          <a:p>
-            <a:endParaRPr lang="en-US"/>
-          </a:p>
-        </p:txBody>
       </p:sp>
       <p:sp>
         <p:nvSpPr>
@@ -20377,13 +19852,6 @@
             </a:outerShdw>
           </a:effectLst>
         </p:spPr>
-        <p:txBody>
-          <a:bodyPr/>
-          <a:lstStyle/>
-          <a:p>
-            <a:endParaRPr lang="en-US"/>
-          </a:p>
-        </p:txBody>
       </p:sp>
       <p:sp>
         <p:nvSpPr>
@@ -20494,13 +19962,6 @@
             </a:outerShdw>
           </a:effectLst>
         </p:spPr>
-        <p:txBody>
-          <a:bodyPr/>
-          <a:lstStyle/>
-          <a:p>
-            <a:endParaRPr lang="en-US"/>
-          </a:p>
-        </p:txBody>
       </p:sp>
       <p:sp>
         <p:nvSpPr>
@@ -20604,13 +20065,6 @@
           </a:solidFill>
           <a:ln/>
         </p:spPr>
-        <p:txBody>
-          <a:bodyPr/>
-          <a:lstStyle/>
-          <a:p>
-            <a:endParaRPr lang="en-US"/>
-          </a:p>
-        </p:txBody>
       </p:sp>
       <p:sp>
         <p:nvSpPr>
@@ -20718,13 +20172,6 @@
             </a:outerShdw>
           </a:effectLst>
         </p:spPr>
-        <p:txBody>
-          <a:bodyPr/>
-          <a:lstStyle/>
-          <a:p>
-            <a:endParaRPr lang="en-US"/>
-          </a:p>
-        </p:txBody>
       </p:sp>
       <p:sp>
         <p:nvSpPr>
@@ -20745,13 +20192,6 @@
           </a:solidFill>
           <a:ln/>
         </p:spPr>
-        <p:txBody>
-          <a:bodyPr/>
-          <a:lstStyle/>
-          <a:p>
-            <a:endParaRPr lang="en-US"/>
-          </a:p>
-        </p:txBody>
       </p:sp>
       <p:sp>
         <p:nvSpPr>
@@ -20935,13 +20375,6 @@
             </a:outerShdw>
           </a:effectLst>
         </p:spPr>
-        <p:txBody>
-          <a:bodyPr/>
-          <a:lstStyle/>
-          <a:p>
-            <a:endParaRPr lang="en-US"/>
-          </a:p>
-        </p:txBody>
       </p:sp>
       <p:sp>
         <p:nvSpPr>
@@ -20962,13 +20395,6 @@
           </a:solidFill>
           <a:ln/>
         </p:spPr>
-        <p:txBody>
-          <a:bodyPr/>
-          <a:lstStyle/>
-          <a:p>
-            <a:endParaRPr lang="en-US"/>
-          </a:p>
-        </p:txBody>
       </p:sp>
       <p:sp>
         <p:nvSpPr>
@@ -21152,13 +20578,6 @@
             </a:outerShdw>
           </a:effectLst>
         </p:spPr>
-        <p:txBody>
-          <a:bodyPr/>
-          <a:lstStyle/>
-          <a:p>
-            <a:endParaRPr lang="en-US"/>
-          </a:p>
-        </p:txBody>
       </p:sp>
       <p:sp>
         <p:nvSpPr>
@@ -21179,13 +20598,6 @@
           </a:solidFill>
           <a:ln/>
         </p:spPr>
-        <p:txBody>
-          <a:bodyPr/>
-          <a:lstStyle/>
-          <a:p>
-            <a:endParaRPr lang="en-US"/>
-          </a:p>
-        </p:txBody>
       </p:sp>
       <p:sp>
         <p:nvSpPr>
@@ -21393,13 +20805,6 @@
           </a:solidFill>
           <a:ln/>
         </p:spPr>
-        <p:txBody>
-          <a:bodyPr/>
-          <a:lstStyle/>
-          <a:p>
-            <a:endParaRPr lang="en-US"/>
-          </a:p>
-        </p:txBody>
       </p:sp>
       <p:sp>
         <p:nvSpPr>
@@ -21507,13 +20912,6 @@
             </a:outerShdw>
           </a:effectLst>
         </p:spPr>
-        <p:txBody>
-          <a:bodyPr/>
-          <a:lstStyle/>
-          <a:p>
-            <a:endParaRPr lang="en-US"/>
-          </a:p>
-        </p:txBody>
       </p:sp>
       <p:sp>
         <p:nvSpPr>
@@ -21534,13 +20932,6 @@
           </a:solidFill>
           <a:ln/>
         </p:spPr>
-        <p:txBody>
-          <a:bodyPr/>
-          <a:lstStyle/>
-          <a:p>
-            <a:endParaRPr lang="en-US"/>
-          </a:p>
-        </p:txBody>
       </p:sp>
       <p:sp>
         <p:nvSpPr>
@@ -21724,13 +21115,6 @@
             </a:outerShdw>
           </a:effectLst>
         </p:spPr>
-        <p:txBody>
-          <a:bodyPr/>
-          <a:lstStyle/>
-          <a:p>
-            <a:endParaRPr lang="en-US"/>
-          </a:p>
-        </p:txBody>
       </p:sp>
       <p:sp>
         <p:nvSpPr>
@@ -21751,13 +21135,6 @@
           </a:solidFill>
           <a:ln/>
         </p:spPr>
-        <p:txBody>
-          <a:bodyPr/>
-          <a:lstStyle/>
-          <a:p>
-            <a:endParaRPr lang="en-US"/>
-          </a:p>
-        </p:txBody>
       </p:sp>
       <p:sp>
         <p:nvSpPr>
@@ -21941,13 +21318,6 @@
             </a:outerShdw>
           </a:effectLst>
         </p:spPr>
-        <p:txBody>
-          <a:bodyPr/>
-          <a:lstStyle/>
-          <a:p>
-            <a:endParaRPr lang="en-US"/>
-          </a:p>
-        </p:txBody>
       </p:sp>
       <p:sp>
         <p:nvSpPr>
@@ -21968,13 +21338,6 @@
           </a:solidFill>
           <a:ln/>
         </p:spPr>
-        <p:txBody>
-          <a:bodyPr/>
-          <a:lstStyle/>
-          <a:p>
-            <a:endParaRPr lang="en-US"/>
-          </a:p>
-        </p:txBody>
       </p:sp>
       <p:sp>
         <p:nvSpPr>
@@ -22182,13 +21545,6 @@
           </a:solidFill>
           <a:ln/>
         </p:spPr>
-        <p:txBody>
-          <a:bodyPr/>
-          <a:lstStyle/>
-          <a:p>
-            <a:endParaRPr lang="en-US"/>
-          </a:p>
-        </p:txBody>
       </p:sp>
       <p:sp>
         <p:nvSpPr>
@@ -22296,13 +21652,6 @@
             </a:outerShdw>
           </a:effectLst>
         </p:spPr>
-        <p:txBody>
-          <a:bodyPr/>
-          <a:lstStyle/>
-          <a:p>
-            <a:endParaRPr lang="en-US"/>
-          </a:p>
-        </p:txBody>
       </p:sp>
       <p:sp>
         <p:nvSpPr>
@@ -22561,13 +21910,6 @@
             </a:outerShdw>
           </a:effectLst>
         </p:spPr>
-        <p:txBody>
-          <a:bodyPr/>
-          <a:lstStyle/>
-          <a:p>
-            <a:endParaRPr lang="en-US"/>
-          </a:p>
-        </p:txBody>
       </p:sp>
       <p:sp>
         <p:nvSpPr>
@@ -22670,13 +22012,6 @@
             <a:tailEnd type="triangle"/>
           </a:ln>
         </p:spPr>
-        <p:txBody>
-          <a:bodyPr/>
-          <a:lstStyle/>
-          <a:p>
-            <a:endParaRPr lang="en-US"/>
-          </a:p>
-        </p:txBody>
       </p:sp>
       <p:sp>
         <p:nvSpPr>
@@ -22706,13 +22041,6 @@
             </a:outerShdw>
           </a:effectLst>
         </p:spPr>
-        <p:txBody>
-          <a:bodyPr/>
-          <a:lstStyle/>
-          <a:p>
-            <a:endParaRPr lang="en-US"/>
-          </a:p>
-        </p:txBody>
       </p:sp>
       <p:sp>
         <p:nvSpPr>
@@ -22883,13 +22211,6 @@
           </a:solidFill>
           <a:ln/>
         </p:spPr>
-        <p:txBody>
-          <a:bodyPr/>
-          <a:lstStyle/>
-          <a:p>
-            <a:endParaRPr lang="en-US"/>
-          </a:p>
-        </p:txBody>
       </p:sp>
       <p:sp>
         <p:nvSpPr>
@@ -25225,13 +24546,6 @@
             </a:outerShdw>
           </a:effectLst>
         </p:spPr>
-        <p:txBody>
-          <a:bodyPr/>
-          <a:lstStyle/>
-          <a:p>
-            <a:endParaRPr lang="en-US"/>
-          </a:p>
-        </p:txBody>
       </p:sp>
       <p:sp>
         <p:nvSpPr>
@@ -25342,13 +24656,6 @@
             </a:outerShdw>
           </a:effectLst>
         </p:spPr>
-        <p:txBody>
-          <a:bodyPr/>
-          <a:lstStyle/>
-          <a:p>
-            <a:endParaRPr lang="en-US"/>
-          </a:p>
-        </p:txBody>
       </p:sp>
       <p:sp>
         <p:nvSpPr>
@@ -25483,13 +24790,6 @@
           </a:solidFill>
           <a:ln/>
         </p:spPr>
-        <p:txBody>
-          <a:bodyPr/>
-          <a:lstStyle/>
-          <a:p>
-            <a:endParaRPr lang="en-US"/>
-          </a:p>
-        </p:txBody>
       </p:sp>
       <p:sp>
         <p:nvSpPr>
@@ -25737,81 +25037,6 @@
       </p:sp>
       <p:sp>
         <p:nvSpPr>
-          <p:cNvPr id="6" name="Shape 4"/>
-          <p:cNvSpPr/>
-          <p:nvPr/>
-        </p:nvSpPr>
-        <p:spPr>
-          <a:xfrm>
-            <a:off x="566928" y="4809744"/>
-            <a:ext cx="5394960" cy="1591056"/>
-          </a:xfrm>
-          <a:prstGeom prst="roundRect">
-            <a:avLst>
-              <a:gd name="adj" fmla="val 3448"/>
-            </a:avLst>
-          </a:prstGeom>
-          <a:solidFill>
-            <a:srgbClr val="0F2A47"/>
-          </a:solidFill>
-          <a:ln/>
-          <a:effectLst>
-            <a:outerShdw blurRad="101600" dist="25400" dir="5400000" algn="bl" rotWithShape="0">
-              <a:srgbClr val="9AAAB8">
-                <a:alpha val="25000"/>
-              </a:srgbClr>
-            </a:outerShdw>
-          </a:effectLst>
-        </p:spPr>
-        <p:txBody>
-          <a:bodyPr/>
-          <a:lstStyle/>
-          <a:p>
-            <a:endParaRPr lang="en-US"/>
-          </a:p>
-        </p:txBody>
-      </p:sp>
-      <p:sp>
-        <p:nvSpPr>
-          <p:cNvPr id="7" name="Text 5"/>
-          <p:cNvSpPr txBox="1"/>
-          <p:nvPr/>
-        </p:nvSpPr>
-        <p:spPr>
-          <a:xfrm>
-            <a:off x="804672" y="5010912"/>
-            <a:ext cx="4937760" cy="310896"/>
-          </a:xfrm>
-          <a:prstGeom prst="rect">
-            <a:avLst/>
-          </a:prstGeom>
-          <a:noFill/>
-          <a:ln/>
-        </p:spPr>
-        <p:txBody>
-          <a:bodyPr wrap="square" lIns="0" tIns="0" rIns="0" bIns="0" rtlCol="0" anchor="ctr"/>
-          <a:lstStyle/>
-          <a:p>
-            <a:pPr marL="0" indent="0">
-              <a:buNone/>
-            </a:pPr>
-            <a:r>
-              <a:rPr lang="en-US" sz="1500" b="1" dirty="0">
-                <a:solidFill>
-                  <a:srgbClr val="2EC4B6"/>
-                </a:solidFill>
-                <a:latin typeface="Cambria" pitchFamily="34" charset="0"/>
-                <a:ea typeface="Cambria" pitchFamily="34" charset="-122"/>
-                <a:cs typeface="Cambria" pitchFamily="34" charset="-120"/>
-              </a:rPr>
-              <a:t>Next step — already validated</a:t>
-            </a:r>
-            <a:endParaRPr lang="en-US" sz="1500" dirty="0"/>
-          </a:p>
-        </p:txBody>
-      </p:sp>
-      <p:sp>
-        <p:nvSpPr>
           <p:cNvPr id="8" name="Text 6"/>
           <p:cNvSpPr txBox="1"/>
           <p:nvPr/>
@@ -25847,123 +25072,6 @@
                 <a:cs typeface="Calibri" pitchFamily="34" charset="-120"/>
               </a:rPr>
               <a:t>A circular buffer cuts the design to 338 LUT / 99 FF / 0 BRAM at the same throughput.</a:t>
-            </a:r>
-            <a:endParaRPr lang="en-US" sz="1300" dirty="0"/>
-          </a:p>
-        </p:txBody>
-      </p:sp>
-      <p:sp>
-        <p:nvSpPr>
-          <p:cNvPr id="9" name="Shape 7"/>
-          <p:cNvSpPr/>
-          <p:nvPr/>
-        </p:nvSpPr>
-        <p:spPr>
-          <a:xfrm>
-            <a:off x="6227064" y="4809744"/>
-            <a:ext cx="5394960" cy="1591056"/>
-          </a:xfrm>
-          <a:prstGeom prst="roundRect">
-            <a:avLst>
-              <a:gd name="adj" fmla="val 3448"/>
-            </a:avLst>
-          </a:prstGeom>
-          <a:solidFill>
-            <a:srgbClr val="F1F5F8"/>
-          </a:solidFill>
-          <a:ln/>
-          <a:effectLst>
-            <a:outerShdw blurRad="101600" dist="25400" dir="5400000" algn="bl" rotWithShape="0">
-              <a:srgbClr val="9AAAB8">
-                <a:alpha val="25000"/>
-              </a:srgbClr>
-            </a:outerShdw>
-          </a:effectLst>
-        </p:spPr>
-        <p:txBody>
-          <a:bodyPr/>
-          <a:lstStyle/>
-          <a:p>
-            <a:endParaRPr lang="en-US"/>
-          </a:p>
-        </p:txBody>
-      </p:sp>
-      <p:sp>
-        <p:nvSpPr>
-          <p:cNvPr id="10" name="Text 8"/>
-          <p:cNvSpPr txBox="1"/>
-          <p:nvPr/>
-        </p:nvSpPr>
-        <p:spPr>
-          <a:xfrm>
-            <a:off x="6464808" y="5010912"/>
-            <a:ext cx="4937760" cy="310896"/>
-          </a:xfrm>
-          <a:prstGeom prst="rect">
-            <a:avLst/>
-          </a:prstGeom>
-          <a:noFill/>
-          <a:ln/>
-        </p:spPr>
-        <p:txBody>
-          <a:bodyPr wrap="square" lIns="0" tIns="0" rIns="0" bIns="0" rtlCol="0" anchor="ctr"/>
-          <a:lstStyle/>
-          <a:p>
-            <a:pPr marL="0" indent="0">
-              <a:buNone/>
-            </a:pPr>
-            <a:r>
-              <a:rPr lang="en-US" sz="1500" b="1" dirty="0">
-                <a:solidFill>
-                  <a:srgbClr val="0F2A47"/>
-                </a:solidFill>
-                <a:latin typeface="Cambria" pitchFamily="34" charset="0"/>
-                <a:ea typeface="Cambria" pitchFamily="34" charset="-122"/>
-                <a:cs typeface="Cambria" pitchFamily="34" charset="-120"/>
-              </a:rPr>
-              <a:t>Further work</a:t>
-            </a:r>
-            <a:endParaRPr lang="en-US" sz="1500" dirty="0"/>
-          </a:p>
-        </p:txBody>
-      </p:sp>
-      <p:sp>
-        <p:nvSpPr>
-          <p:cNvPr id="11" name="Text 9"/>
-          <p:cNvSpPr txBox="1"/>
-          <p:nvPr/>
-        </p:nvSpPr>
-        <p:spPr>
-          <a:xfrm>
-            <a:off x="6464808" y="5431536"/>
-            <a:ext cx="4937760" cy="868680"/>
-          </a:xfrm>
-          <a:prstGeom prst="rect">
-            <a:avLst/>
-          </a:prstGeom>
-          <a:noFill/>
-          <a:ln/>
-        </p:spPr>
-        <p:txBody>
-          <a:bodyPr wrap="square" lIns="0" tIns="0" rIns="0" bIns="0" rtlCol="0" anchor="ctr"/>
-          <a:lstStyle/>
-          <a:p>
-            <a:pPr marL="0" indent="0">
-              <a:lnSpc>
-                <a:spcPts val="1800"/>
-              </a:lnSpc>
-              <a:buNone/>
-            </a:pPr>
-            <a:r>
-              <a:rPr lang="en-US" sz="1300" dirty="0">
-                <a:solidFill>
-                  <a:srgbClr val="1A2430"/>
-                </a:solidFill>
-                <a:latin typeface="Calibri" pitchFamily="34" charset="0"/>
-                <a:ea typeface="Calibri" pitchFamily="34" charset="-122"/>
-                <a:cs typeface="Calibri" pitchFamily="34" charset="-120"/>
-              </a:rPr>
-              <a:t>Use the DSP48E1 pre-adder so adder, multiplier and accumulator become one slice; add an AXI-Stream interface for real-time data.</a:t>
             </a:r>
             <a:endParaRPr lang="en-US" sz="1300" dirty="0"/>
           </a:p>
@@ -26021,13 +25129,6 @@
           </a:solidFill>
           <a:ln/>
         </p:spPr>
-        <p:txBody>
-          <a:bodyPr/>
-          <a:lstStyle/>
-          <a:p>
-            <a:endParaRPr lang="en-US"/>
-          </a:p>
-        </p:txBody>
       </p:sp>
       <p:sp>
         <p:nvSpPr>
@@ -26783,13 +25884,6 @@
           </a:solidFill>
           <a:ln/>
         </p:spPr>
-        <p:txBody>
-          <a:bodyPr/>
-          <a:lstStyle/>
-          <a:p>
-            <a:endParaRPr lang="en-US"/>
-          </a:p>
-        </p:txBody>
       </p:sp>
       <p:sp>
         <p:nvSpPr>
@@ -26810,13 +25904,6 @@
           </a:solidFill>
           <a:ln/>
         </p:spPr>
-        <p:txBody>
-          <a:bodyPr/>
-          <a:lstStyle/>
-          <a:p>
-            <a:endParaRPr lang="en-US"/>
-          </a:p>
-        </p:txBody>
       </p:sp>
       <p:sp>
         <p:nvSpPr>
@@ -27026,13 +26113,6 @@
           </a:solidFill>
           <a:ln/>
         </p:spPr>
-        <p:txBody>
-          <a:bodyPr/>
-          <a:lstStyle/>
-          <a:p>
-            <a:endParaRPr lang="en-US"/>
-          </a:p>
-        </p:txBody>
       </p:sp>
       <p:sp>
         <p:nvSpPr>
@@ -27282,13 +26362,6 @@
             </a:outerShdw>
           </a:effectLst>
         </p:spPr>
-        <p:txBody>
-          <a:bodyPr/>
-          <a:lstStyle/>
-          <a:p>
-            <a:endParaRPr lang="en-US"/>
-          </a:p>
-        </p:txBody>
       </p:sp>
       <p:sp>
         <p:nvSpPr>
@@ -27441,13 +26514,6 @@
             </a:outerShdw>
           </a:effectLst>
         </p:spPr>
-        <p:txBody>
-          <a:bodyPr/>
-          <a:lstStyle/>
-          <a:p>
-            <a:endParaRPr lang="en-US"/>
-          </a:p>
-        </p:txBody>
       </p:sp>
       <p:sp>
         <p:nvSpPr>
@@ -27555,13 +26621,6 @@
             </a:outerShdw>
           </a:effectLst>
         </p:spPr>
-        <p:txBody>
-          <a:bodyPr/>
-          <a:lstStyle/>
-          <a:p>
-            <a:endParaRPr lang="en-US"/>
-          </a:p>
-        </p:txBody>
       </p:sp>
       <p:sp>
         <p:nvSpPr>
@@ -27669,13 +26728,6 @@
             </a:outerShdw>
           </a:effectLst>
         </p:spPr>
-        <p:txBody>
-          <a:bodyPr/>
-          <a:lstStyle/>
-          <a:p>
-            <a:endParaRPr lang="en-US"/>
-          </a:p>
-        </p:txBody>
       </p:sp>
       <p:sp>
         <p:nvSpPr>
@@ -27783,13 +26835,6 @@
             </a:outerShdw>
           </a:effectLst>
         </p:spPr>
-        <p:txBody>
-          <a:bodyPr/>
-          <a:lstStyle/>
-          <a:p>
-            <a:endParaRPr lang="en-US"/>
-          </a:p>
-        </p:txBody>
       </p:sp>
       <p:sp>
         <p:nvSpPr>
@@ -27921,13 +26966,6 @@
           </a:solidFill>
           <a:ln/>
         </p:spPr>
-        <p:txBody>
-          <a:bodyPr/>
-          <a:lstStyle/>
-          <a:p>
-            <a:endParaRPr lang="en-US"/>
-          </a:p>
-        </p:txBody>
       </p:sp>
       <p:sp>
         <p:nvSpPr>
@@ -28122,13 +27160,6 @@
           </a:solidFill>
           <a:ln/>
         </p:spPr>
-        <p:txBody>
-          <a:bodyPr/>
-          <a:lstStyle/>
-          <a:p>
-            <a:endParaRPr lang="en-US"/>
-          </a:p>
-        </p:txBody>
       </p:sp>
       <p:sp>
         <p:nvSpPr>
@@ -28271,6 +27302,53 @@
           </a:p>
         </p:txBody>
       </p:sp>
+      <p:pic>
+        <p:nvPicPr>
+          <p:cNvPr id="1026" name="Picture 2" descr="FIR Filter">
+            <a:extLst>
+              <a:ext uri="{FF2B5EF4-FFF2-40B4-BE49-F238E27FC236}">
+                <a16:creationId xmlns:a16="http://schemas.microsoft.com/office/drawing/2014/main" id="{C859E909-CA5F-4B4D-AC52-7CF88BEF18B8}"/>
+              </a:ext>
+            </a:extLst>
+          </p:cNvPr>
+          <p:cNvPicPr>
+            <a:picLocks noChangeAspect="1" noChangeArrowheads="1"/>
+          </p:cNvPicPr>
+          <p:nvPr/>
+        </p:nvPicPr>
+        <p:blipFill>
+          <a:blip r:embed="rId4">
+            <a:extLst>
+              <a:ext uri="{28A0092B-C50C-407E-A947-70E740481C1C}">
+                <a14:useLocalDpi xmlns:a14="http://schemas.microsoft.com/office/drawing/2010/main" val="0"/>
+              </a:ext>
+            </a:extLst>
+          </a:blip>
+          <a:srcRect/>
+          <a:stretch>
+            <a:fillRect/>
+          </a:stretch>
+        </p:blipFill>
+        <p:spPr bwMode="auto">
+          <a:xfrm>
+            <a:off x="342900" y="4360926"/>
+            <a:ext cx="3295650" cy="1390650"/>
+          </a:xfrm>
+          <a:prstGeom prst="rect">
+            <a:avLst/>
+          </a:prstGeom>
+          <a:noFill/>
+          <a:extLst>
+            <a:ext uri="{909E8E84-426E-40DD-AFC4-6F175D3DCCD1}">
+              <a14:hiddenFill xmlns:a14="http://schemas.microsoft.com/office/drawing/2010/main">
+                <a:solidFill>
+                  <a:srgbClr val="FFFFFF"/>
+                </a:solidFill>
+              </a14:hiddenFill>
+            </a:ext>
+          </a:extLst>
+        </p:spPr>
+      </p:pic>
     </p:spTree>
   </p:cSld>
   <p:clrMapOvr>
@@ -28323,13 +27401,6 @@
           </a:solidFill>
           <a:ln/>
         </p:spPr>
-        <p:txBody>
-          <a:bodyPr/>
-          <a:lstStyle/>
-          <a:p>
-            <a:endParaRPr lang="en-US"/>
-          </a:p>
-        </p:txBody>
       </p:sp>
       <p:sp>
         <p:nvSpPr>
@@ -29855,13 +28926,6 @@
             </a:outerShdw>
           </a:effectLst>
         </p:spPr>
-        <p:txBody>
-          <a:bodyPr/>
-          <a:lstStyle/>
-          <a:p>
-            <a:endParaRPr lang="en-US"/>
-          </a:p>
-        </p:txBody>
       </p:sp>
       <p:sp>
         <p:nvSpPr>
@@ -30008,13 +29072,6 @@
             </a:outerShdw>
           </a:effectLst>
         </p:spPr>
-        <p:txBody>
-          <a:bodyPr/>
-          <a:lstStyle/>
-          <a:p>
-            <a:endParaRPr lang="en-US"/>
-          </a:p>
-        </p:txBody>
       </p:sp>
       <p:sp>
         <p:nvSpPr>
@@ -30149,13 +29206,6 @@
           </a:solidFill>
           <a:ln/>
         </p:spPr>
-        <p:txBody>
-          <a:bodyPr/>
-          <a:lstStyle/>
-          <a:p>
-            <a:endParaRPr lang="en-US"/>
-          </a:p>
-        </p:txBody>
       </p:sp>
       <p:sp>
         <p:nvSpPr>
@@ -32665,13 +31715,6 @@
             </a:outerShdw>
           </a:effectLst>
         </p:spPr>
-        <p:txBody>
-          <a:bodyPr/>
-          <a:lstStyle/>
-          <a:p>
-            <a:endParaRPr lang="en-US"/>
-          </a:p>
-        </p:txBody>
       </p:sp>
       <p:sp>
         <p:nvSpPr>
@@ -32822,13 +31865,6 @@
             </a:outerShdw>
           </a:effectLst>
         </p:spPr>
-        <p:txBody>
-          <a:bodyPr/>
-          <a:lstStyle/>
-          <a:p>
-            <a:endParaRPr lang="en-US"/>
-          </a:p>
-        </p:txBody>
       </p:sp>
       <p:sp>
         <p:nvSpPr>
@@ -33059,13 +32095,6 @@
           </a:solidFill>
           <a:ln/>
         </p:spPr>
-        <p:txBody>
-          <a:bodyPr/>
-          <a:lstStyle/>
-          <a:p>
-            <a:endParaRPr lang="en-US"/>
-          </a:p>
-        </p:txBody>
       </p:sp>
       <p:sp>
         <p:nvSpPr>
@@ -33139,7 +32168,7 @@
                 <a:ea typeface="Cambria" pitchFamily="34" charset="-122"/>
                 <a:cs typeface="Cambria" pitchFamily="34" charset="-120"/>
               </a:rPr>
-              <a:t>Coefficient Symmetry — Folding</a:t>
+              <a:t>Coefficient  — Folding</a:t>
             </a:r>
             <a:endParaRPr lang="en-US" sz="3000" dirty="0"/>
           </a:p>
@@ -33212,13 +32241,6 @@
             </a:outerShdw>
           </a:effectLst>
         </p:spPr>
-        <p:txBody>
-          <a:bodyPr/>
-          <a:lstStyle/>
-          <a:p>
-            <a:endParaRPr lang="en-US"/>
-          </a:p>
-        </p:txBody>
       </p:sp>
       <p:sp>
         <p:nvSpPr>
@@ -34780,13 +33802,6 @@
           </a:solidFill>
           <a:ln/>
         </p:spPr>
-        <p:txBody>
-          <a:bodyPr/>
-          <a:lstStyle/>
-          <a:p>
-            <a:endParaRPr lang="en-US"/>
-          </a:p>
-        </p:txBody>
       </p:sp>
       <p:sp>
         <p:nvSpPr>
@@ -34894,13 +33909,6 @@
             </a:outerShdw>
           </a:effectLst>
         </p:spPr>
-        <p:txBody>
-          <a:bodyPr/>
-          <a:lstStyle/>
-          <a:p>
-            <a:endParaRPr lang="en-US"/>
-          </a:p>
-        </p:txBody>
       </p:sp>
       <p:sp>
         <p:nvSpPr>
